--- a/public/fun/pack/pptx/wedding/결혼식_31_소개중심_은행잎길.pptx
+++ b/public/fun/pack/pptx/wedding/결혼식_31_소개중심_은행잎길.pptx
@@ -3286,6 +3286,14 @@
 <file path=ppt/slides/slide1.xml><?xml version="1.0" encoding="utf-8"?>
 <p:sld xmlns:a="http://schemas.openxmlformats.org/drawingml/2006/main" xmlns:p="http://schemas.openxmlformats.org/presentationml/2006/main" xmlns:r="http://schemas.openxmlformats.org/officeDocument/2006/relationships">
   <p:cSld>
+    <p:bg>
+      <p:bgPr>
+        <a:solidFill>
+          <a:srgbClr val="FBF8EC"/>
+        </a:solidFill>
+        <a:effectLst/>
+      </p:bgPr>
+    </p:bg>
     <p:spTree>
       <p:nvGrpSpPr>
         <p:cNvPr id="1" name=""/>
@@ -3293,30 +3301,119 @@
         <p:nvPr/>
       </p:nvGrpSpPr>
       <p:grpSpPr/>
-      <p:pic>
-        <p:nvPicPr>
-          <p:cNvPr id="3" name="표지 그림" descr="wedding-31.jpg"/>
-          <p:cNvPicPr>
-            <a:picLocks noChangeAspect="1"/>
-          </p:cNvPicPr>
+      <p:sp>
+        <p:nvSpPr>
+          <p:cNvPr id="3" name="사진 자리"/>
+          <p:cNvSpPr/>
           <p:nvPr/>
-        </p:nvPicPr>
-        <p:blipFill>
-          <a:blip r:embed="rId2"/>
-          <a:stretch>
-            <a:fillRect/>
-          </a:stretch>
-        </p:blipFill>
-        <p:spPr>
-          <a:xfrm>
-            <a:off x="0" y="0"/>
-            <a:ext cx="12191695" cy="6858000"/>
+        </p:nvSpPr>
+        <p:spPr>
+          <a:xfrm>
+            <a:off x="1463003" y="685800"/>
+            <a:ext cx="3169840" cy="5486400"/>
+          </a:xfrm>
+          <a:prstGeom prst="round2SameRect">
+            <a:avLst>
+              <a:gd name="adj1" fmla="val 50000"/>
+              <a:gd name="adj2" fmla="val 0"/>
+            </a:avLst>
+          </a:prstGeom>
+          <a:solidFill>
+            <a:srgbClr val="EBDEAD"/>
+          </a:solidFill>
+          <a:ln>
+            <a:noFill/>
+          </a:ln>
+        </p:spPr>
+        <p:txBody>
+          <a:bodyPr rtlCol="0" anchor="ctr" wrap="square" lIns="54864" rIns="54864" tIns="27432" bIns="27432">
+            <a:noAutofit/>
+          </a:bodyPr>
+          <a:lstStyle/>
+          <a:p>
+            <a:pPr algn="ctr">
+              <a:lnSpc>
+                <a:spcPct val="100000"/>
+              </a:lnSpc>
+            </a:pPr>
+            <a:r>
+              <a:rPr sz="1400" b="0" i="0">
+                <a:solidFill>
+                  <a:srgbClr val="494227"/>
+                </a:solidFill>
+              </a:rPr>
+              <a:t>사진을 넣어 주세요</a:t>
+            </a:r>
+          </a:p>
+        </p:txBody>
+      </p:sp>
+      <p:sp>
+        <p:nvSpPr>
+          <p:cNvPr id="4" name="장식"/>
+          <p:cNvSpPr/>
+          <p:nvPr/>
+        </p:nvSpPr>
+        <p:spPr>
+          <a:xfrm>
+            <a:off x="4358505" y="4251960"/>
+            <a:ext cx="1005840" cy="1005840"/>
+          </a:xfrm>
+          <a:prstGeom prst="ellipse">
+            <a:avLst/>
+          </a:prstGeom>
+          <a:solidFill>
+            <a:srgbClr val="EBDEAD"/>
+          </a:solidFill>
+          <a:ln>
+            <a:noFill/>
+          </a:ln>
+        </p:spPr>
+        <p:txBody>
+          <a:bodyPr rtlCol="0" anchor="ctr"/>
+          <a:lstStyle/>
+          <a:p>
+            <a:pPr algn="ctr"/>
+          </a:p>
+        </p:txBody>
+      </p:sp>
+      <p:sp>
+        <p:nvSpPr>
+          <p:cNvPr id="5" name="라벨"/>
+          <p:cNvSpPr txBox="1"/>
+          <p:nvPr/>
+        </p:nvSpPr>
+        <p:spPr>
+          <a:xfrm>
+            <a:off x="6827349" y="2148840"/>
+            <a:ext cx="4632844" cy="274320"/>
           </a:xfrm>
           <a:prstGeom prst="rect">
             <a:avLst/>
           </a:prstGeom>
-        </p:spPr>
-      </p:pic>
+          <a:noFill/>
+        </p:spPr>
+        <p:txBody>
+          <a:bodyPr wrap="square" lIns="54864" rIns="54864" tIns="27432" bIns="27432" anchor="t">
+            <a:noAutofit/>
+          </a:bodyPr>
+          <a:lstStyle/>
+          <a:p>
+            <a:pPr algn="l">
+              <a:lnSpc>
+                <a:spcPct val="115000"/>
+              </a:lnSpc>
+            </a:pPr>
+            <a:r>
+              <a:rPr sz="1000" b="1" i="0" spc="250">
+                <a:solidFill>
+                  <a:srgbClr val="26231F"/>
+                </a:solidFill>
+              </a:rPr>
+              <a:t>WEDDING</a:t>
+            </a:r>
+          </a:p>
+        </p:txBody>
+      </p:sp>
       <p:sp>
         <p:nvSpPr>
           <p:cNvPr id="2" name="Title 1"/>
@@ -3329,8 +3426,8 @@
         </p:nvSpPr>
         <p:spPr>
           <a:xfrm>
-            <a:off x="853418" y="2057400"/>
-            <a:ext cx="6095847" cy="1554480"/>
+            <a:off x="6827349" y="2606040"/>
+            <a:ext cx="4632844" cy="1188720"/>
           </a:xfrm>
         </p:spPr>
         <p:txBody>
@@ -3347,7 +3444,7 @@
             <a:r>
               <a:rPr sz="3600" b="1" i="0">
                 <a:solidFill>
-                  <a:srgbClr val="756110"/>
+                  <a:srgbClr val="26231F"/>
                 </a:solidFill>
               </a:rPr>
               <a:t>저희 결혼합니다</a:t>
@@ -3357,14 +3454,14 @@
       </p:sp>
       <p:sp>
         <p:nvSpPr>
-          <p:cNvPr id="4" name="한 줄 문구"/>
+          <p:cNvPr id="6" name="한 줄 문구"/>
           <p:cNvSpPr txBox="1"/>
           <p:nvPr/>
         </p:nvSpPr>
         <p:spPr>
           <a:xfrm>
-            <a:off x="853418" y="3749039"/>
-            <a:ext cx="6095847" cy="822960"/>
+            <a:off x="6827349" y="3886200"/>
+            <a:ext cx="4632844" cy="822960"/>
           </a:xfrm>
           <a:prstGeom prst="rect">
             <a:avLst/>
@@ -3383,9 +3480,9 @@
               </a:lnSpc>
             </a:pPr>
             <a:r>
-              <a:rPr sz="1700" b="0" i="1">
-                <a:solidFill>
-                  <a:srgbClr val="756110"/>
+              <a:rPr sz="1700" b="0" i="0">
+                <a:solidFill>
+                  <a:srgbClr val="26231F"/>
                 </a:solidFill>
               </a:rPr>
               <a:t>작게 하지만 정성껏 준비했습니다</a:t>
@@ -3395,14 +3492,14 @@
       </p:sp>
       <p:sp>
         <p:nvSpPr>
-          <p:cNvPr id="5" name="안내 문구"/>
+          <p:cNvPr id="7" name="안내 문구"/>
           <p:cNvSpPr txBox="1"/>
           <p:nvPr/>
         </p:nvSpPr>
         <p:spPr>
           <a:xfrm>
-            <a:off x="853418" y="4617720"/>
-            <a:ext cx="6095847" cy="914400"/>
+            <a:off x="6827349" y="4754880"/>
+            <a:ext cx="4632844" cy="914400"/>
           </a:xfrm>
           <a:prstGeom prst="rect">
             <a:avLst/>
@@ -3423,7 +3520,7 @@
             <a:r>
               <a:rPr sz="1400" b="0" i="0">
                 <a:solidFill>
-                  <a:srgbClr val="666666"/>
+                  <a:srgbClr val="26231F"/>
                 </a:solidFill>
               </a:rPr>
               <a:t>신랑 이름 ♥ 신부 이름</a:t>
@@ -3438,10 +3535,10 @@
             <a:r>
               <a:rPr sz="1400" b="0" i="0">
                 <a:solidFill>
-                  <a:srgbClr val="666666"/>
+                  <a:srgbClr val="26231F"/>
                 </a:solidFill>
               </a:rPr>
-              <a:t>2027. 00. 00 · 예식장 이름</a:t>
+              <a:t>날짜 입력 · 예식장 이름</a:t>
             </a:r>
           </a:p>
         </p:txBody>
@@ -3460,7 +3557,7 @@
     <p:bg>
       <p:bgPr>
         <a:solidFill>
-          <a:srgbClr val="CEAB1C"/>
+          <a:srgbClr val="F6EFD5"/>
         </a:solidFill>
         <a:effectLst/>
       </p:bgPr>
@@ -3480,16 +3577,14 @@
         </p:nvSpPr>
         <p:spPr>
           <a:xfrm>
-            <a:off x="274320" y="274320"/>
-            <a:ext cx="11643055" cy="6309360"/>
-          </a:xfrm>
-          <a:prstGeom prst="roundRect">
-            <a:avLst>
-              <a:gd name="adj" fmla="val 3500"/>
-            </a:avLst>
+            <a:off x="640080" y="566928"/>
+            <a:ext cx="10911535" cy="10972"/>
+          </a:xfrm>
+          <a:prstGeom prst="rect">
+            <a:avLst/>
           </a:prstGeom>
           <a:solidFill>
-            <a:srgbClr val="FFFFFF"/>
+            <a:srgbClr val="26231F"/>
           </a:solidFill>
           <a:ln>
             <a:noFill/>
@@ -3505,6 +3600,73 @@
       </p:sp>
       <p:sp>
         <p:nvSpPr>
+          <p:cNvPr id="4" name="상단 라벨"/>
+          <p:cNvSpPr txBox="1"/>
+          <p:nvPr/>
+        </p:nvSpPr>
+        <p:spPr>
+          <a:xfrm>
+            <a:off x="640080" y="237744"/>
+            <a:ext cx="5486400" cy="274320"/>
+          </a:xfrm>
+          <a:prstGeom prst="rect">
+            <a:avLst/>
+          </a:prstGeom>
+          <a:noFill/>
+        </p:spPr>
+        <p:txBody>
+          <a:bodyPr wrap="square" lIns="54864" rIns="54864" tIns="27432" bIns="27432" anchor="ctr">
+            <a:noAutofit/>
+          </a:bodyPr>
+          <a:lstStyle/>
+          <a:p>
+            <a:pPr algn="l">
+              <a:lnSpc>
+                <a:spcPct val="115000"/>
+              </a:lnSpc>
+            </a:pPr>
+            <a:r>
+              <a:rPr sz="900" b="1" i="0" spc="250">
+                <a:solidFill>
+                  <a:srgbClr val="26231F"/>
+                </a:solidFill>
+              </a:rPr>
+              <a:t>WEDDING</a:t>
+            </a:r>
+          </a:p>
+        </p:txBody>
+      </p:sp>
+      <p:sp>
+        <p:nvSpPr>
+          <p:cNvPr id="5" name="포인트"/>
+          <p:cNvSpPr/>
+          <p:nvPr/>
+        </p:nvSpPr>
+        <p:spPr>
+          <a:xfrm rot="18900000">
+            <a:off x="11204143" y="246888"/>
+            <a:ext cx="237744" cy="237744"/>
+          </a:xfrm>
+          <a:prstGeom prst="teardrop">
+            <a:avLst/>
+          </a:prstGeom>
+          <a:solidFill>
+            <a:srgbClr val="D8C579"/>
+          </a:solidFill>
+          <a:ln>
+            <a:noFill/>
+          </a:ln>
+        </p:spPr>
+        <p:txBody>
+          <a:bodyPr rtlCol="0" anchor="ctr"/>
+          <a:lstStyle/>
+          <a:p>
+            <a:pPr algn="ctr"/>
+          </a:p>
+        </p:txBody>
+      </p:sp>
+      <p:sp>
+        <p:nvSpPr>
           <p:cNvPr id="2" name="Title 1"/>
           <p:cNvSpPr>
             <a:spLocks noGrp="1"/>
@@ -3515,8 +3677,8 @@
         </p:nvSpPr>
         <p:spPr>
           <a:xfrm>
-            <a:off x="731520" y="548640"/>
-            <a:ext cx="9448495" cy="868680"/>
+            <a:off x="640080" y="731520"/>
+            <a:ext cx="10911535" cy="822960"/>
           </a:xfrm>
         </p:spPr>
         <p:txBody>
@@ -3533,7 +3695,7 @@
             <a:r>
               <a:rPr sz="3000" b="1" i="0">
                 <a:solidFill>
-                  <a:srgbClr val="756110"/>
+                  <a:srgbClr val="26231F"/>
                 </a:solidFill>
               </a:rPr>
               <a:t>신랑 · 신부 소개</a:t>
@@ -3543,25 +3705,23 @@
       </p:sp>
       <p:sp>
         <p:nvSpPr>
-          <p:cNvPr id="4" name="사진 자리"/>
+          <p:cNvPr id="6" name="사진 자리"/>
           <p:cNvSpPr/>
           <p:nvPr/>
         </p:nvSpPr>
         <p:spPr>
           <a:xfrm>
-            <a:off x="2030653" y="1600200"/>
-            <a:ext cx="2308860" cy="2308860"/>
+            <a:off x="1996363" y="1783080"/>
+            <a:ext cx="2286000" cy="2286000"/>
           </a:xfrm>
           <a:prstGeom prst="ellipse">
             <a:avLst/>
           </a:prstGeom>
           <a:solidFill>
-            <a:srgbClr val="F9EFC8"/>
+            <a:srgbClr val="F6EFD5"/>
           </a:solidFill>
           <a:ln w="19050">
-            <a:solidFill>
-              <a:srgbClr val="CEAB1C"/>
-            </a:solidFill>
+            <a:noFill/>
             <a:prstDash val="dash"/>
           </a:ln>
         </p:spPr>
@@ -3579,7 +3739,7 @@
             <a:r>
               <a:rPr sz="1200" b="0" i="0">
                 <a:solidFill>
-                  <a:srgbClr val="756110"/>
+                  <a:srgbClr val="8E8780"/>
                 </a:solidFill>
               </a:rPr>
               <a:t>사진</a:t>
@@ -3589,14 +3749,14 @@
       </p:sp>
       <p:sp>
         <p:nvSpPr>
-          <p:cNvPr id="5" name="TextBox 4"/>
+          <p:cNvPr id="7" name="TextBox 6"/>
           <p:cNvSpPr txBox="1"/>
           <p:nvPr/>
         </p:nvSpPr>
         <p:spPr>
           <a:xfrm>
-            <a:off x="731520" y="4000500"/>
-            <a:ext cx="4907127" cy="411480"/>
+            <a:off x="640080" y="4160520"/>
+            <a:ext cx="4998567" cy="411480"/>
           </a:xfrm>
           <a:prstGeom prst="rect">
             <a:avLst/>
@@ -3617,7 +3777,7 @@
             <a:r>
               <a:rPr sz="1600" b="1" i="0">
                 <a:solidFill>
-                  <a:srgbClr val="756110"/>
+                  <a:srgbClr val="494227"/>
                 </a:solidFill>
               </a:rPr>
               <a:t>신랑</a:t>
@@ -3627,14 +3787,14 @@
       </p:sp>
       <p:sp>
         <p:nvSpPr>
-          <p:cNvPr id="6" name="TextBox 5"/>
+          <p:cNvPr id="8" name="TextBox 7"/>
           <p:cNvSpPr txBox="1"/>
           <p:nvPr/>
         </p:nvSpPr>
         <p:spPr>
           <a:xfrm>
-            <a:off x="822960" y="4457700"/>
-            <a:ext cx="4724247" cy="1760219"/>
+            <a:off x="731519" y="4617720"/>
+            <a:ext cx="4815687" cy="1737360"/>
           </a:xfrm>
           <a:prstGeom prst="rect">
             <a:avLst/>
@@ -3695,25 +3855,23 @@
       </p:sp>
       <p:sp>
         <p:nvSpPr>
-          <p:cNvPr id="7" name="사진 자리"/>
+          <p:cNvPr id="9" name="사진 자리"/>
           <p:cNvSpPr/>
           <p:nvPr/>
         </p:nvSpPr>
         <p:spPr>
           <a:xfrm>
-            <a:off x="7852181" y="1600200"/>
-            <a:ext cx="2308860" cy="2308860"/>
+            <a:off x="7909331" y="1783080"/>
+            <a:ext cx="2286000" cy="2286000"/>
           </a:xfrm>
           <a:prstGeom prst="ellipse">
             <a:avLst/>
           </a:prstGeom>
           <a:solidFill>
-            <a:srgbClr val="F9EFC8"/>
+            <a:srgbClr val="F6EFD5"/>
           </a:solidFill>
           <a:ln w="19050">
-            <a:solidFill>
-              <a:srgbClr val="CEAB1C"/>
-            </a:solidFill>
+            <a:noFill/>
             <a:prstDash val="dash"/>
           </a:ln>
         </p:spPr>
@@ -3731,7 +3889,7 @@
             <a:r>
               <a:rPr sz="1200" b="0" i="0">
                 <a:solidFill>
-                  <a:srgbClr val="756110"/>
+                  <a:srgbClr val="8E8780"/>
                 </a:solidFill>
               </a:rPr>
               <a:t>사진</a:t>
@@ -3741,14 +3899,14 @@
       </p:sp>
       <p:sp>
         <p:nvSpPr>
-          <p:cNvPr id="8" name="TextBox 7"/>
+          <p:cNvPr id="10" name="TextBox 9"/>
           <p:cNvSpPr txBox="1"/>
           <p:nvPr/>
         </p:nvSpPr>
         <p:spPr>
           <a:xfrm>
-            <a:off x="6553047" y="4000500"/>
-            <a:ext cx="4907127" cy="411480"/>
+            <a:off x="6553047" y="4160520"/>
+            <a:ext cx="4998567" cy="411480"/>
           </a:xfrm>
           <a:prstGeom prst="rect">
             <a:avLst/>
@@ -3769,7 +3927,7 @@
             <a:r>
               <a:rPr sz="1600" b="1" i="0">
                 <a:solidFill>
-                  <a:srgbClr val="756110"/>
+                  <a:srgbClr val="494227"/>
                 </a:solidFill>
               </a:rPr>
               <a:t>신부</a:t>
@@ -3779,14 +3937,14 @@
       </p:sp>
       <p:sp>
         <p:nvSpPr>
-          <p:cNvPr id="9" name="TextBox 8"/>
+          <p:cNvPr id="11" name="TextBox 10"/>
           <p:cNvSpPr txBox="1"/>
           <p:nvPr/>
         </p:nvSpPr>
         <p:spPr>
           <a:xfrm>
-            <a:off x="6644487" y="4457700"/>
-            <a:ext cx="4724247" cy="1760219"/>
+            <a:off x="6644487" y="4617720"/>
+            <a:ext cx="4815687" cy="1737360"/>
           </a:xfrm>
           <a:prstGeom prst="rect">
             <a:avLst/>
@@ -3859,7 +4017,7 @@
     <p:bg>
       <p:bgPr>
         <a:solidFill>
-          <a:srgbClr val="CEAB1C"/>
+          <a:srgbClr val="F6EFD5"/>
         </a:solidFill>
         <a:effectLst/>
       </p:bgPr>
@@ -3879,16 +4037,14 @@
         </p:nvSpPr>
         <p:spPr>
           <a:xfrm>
-            <a:off x="274320" y="274320"/>
-            <a:ext cx="11643055" cy="6309360"/>
-          </a:xfrm>
-          <a:prstGeom prst="roundRect">
-            <a:avLst>
-              <a:gd name="adj" fmla="val 3500"/>
-            </a:avLst>
+            <a:off x="640080" y="566928"/>
+            <a:ext cx="10911535" cy="10972"/>
+          </a:xfrm>
+          <a:prstGeom prst="rect">
+            <a:avLst/>
           </a:prstGeom>
           <a:solidFill>
-            <a:srgbClr val="FFFFFF"/>
+            <a:srgbClr val="26231F"/>
           </a:solidFill>
           <a:ln>
             <a:noFill/>
@@ -3904,6 +4060,73 @@
       </p:sp>
       <p:sp>
         <p:nvSpPr>
+          <p:cNvPr id="4" name="상단 라벨"/>
+          <p:cNvSpPr txBox="1"/>
+          <p:nvPr/>
+        </p:nvSpPr>
+        <p:spPr>
+          <a:xfrm>
+            <a:off x="640080" y="237744"/>
+            <a:ext cx="5486400" cy="274320"/>
+          </a:xfrm>
+          <a:prstGeom prst="rect">
+            <a:avLst/>
+          </a:prstGeom>
+          <a:noFill/>
+        </p:spPr>
+        <p:txBody>
+          <a:bodyPr wrap="square" lIns="54864" rIns="54864" tIns="27432" bIns="27432" anchor="ctr">
+            <a:noAutofit/>
+          </a:bodyPr>
+          <a:lstStyle/>
+          <a:p>
+            <a:pPr algn="l">
+              <a:lnSpc>
+                <a:spcPct val="115000"/>
+              </a:lnSpc>
+            </a:pPr>
+            <a:r>
+              <a:rPr sz="900" b="1" i="0" spc="250">
+                <a:solidFill>
+                  <a:srgbClr val="26231F"/>
+                </a:solidFill>
+              </a:rPr>
+              <a:t>WEDDING</a:t>
+            </a:r>
+          </a:p>
+        </p:txBody>
+      </p:sp>
+      <p:sp>
+        <p:nvSpPr>
+          <p:cNvPr id="5" name="포인트"/>
+          <p:cNvSpPr/>
+          <p:nvPr/>
+        </p:nvSpPr>
+        <p:spPr>
+          <a:xfrm rot="18900000">
+            <a:off x="11204143" y="246888"/>
+            <a:ext cx="237744" cy="237744"/>
+          </a:xfrm>
+          <a:prstGeom prst="teardrop">
+            <a:avLst/>
+          </a:prstGeom>
+          <a:solidFill>
+            <a:srgbClr val="D8C579"/>
+          </a:solidFill>
+          <a:ln>
+            <a:noFill/>
+          </a:ln>
+        </p:spPr>
+        <p:txBody>
+          <a:bodyPr rtlCol="0" anchor="ctr"/>
+          <a:lstStyle/>
+          <a:p>
+            <a:pPr algn="ctr"/>
+          </a:p>
+        </p:txBody>
+      </p:sp>
+      <p:sp>
+        <p:nvSpPr>
           <p:cNvPr id="2" name="Title 1"/>
           <p:cNvSpPr>
             <a:spLocks noGrp="1"/>
@@ -3914,8 +4137,8 @@
         </p:nvSpPr>
         <p:spPr>
           <a:xfrm>
-            <a:off x="731520" y="548640"/>
-            <a:ext cx="9448495" cy="868680"/>
+            <a:off x="640080" y="731520"/>
+            <a:ext cx="10911535" cy="822960"/>
           </a:xfrm>
         </p:spPr>
         <p:txBody>
@@ -3932,7 +4155,7 @@
             <a:r>
               <a:rPr sz="3000" b="1" i="0">
                 <a:solidFill>
-                  <a:srgbClr val="756110"/>
+                  <a:srgbClr val="26231F"/>
                 </a:solidFill>
               </a:rPr>
               <a:t>우리 두 사람</a:t>
@@ -3942,27 +4165,25 @@
       </p:sp>
       <p:sp>
         <p:nvSpPr>
-          <p:cNvPr id="4" name="왼쪽 칸"/>
+          <p:cNvPr id="6" name="왼쪽 칸"/>
           <p:cNvSpPr/>
           <p:nvPr/>
         </p:nvSpPr>
         <p:spPr>
           <a:xfrm>
-            <a:off x="731520" y="1600200"/>
-            <a:ext cx="5181447" cy="4617720"/>
+            <a:off x="640080" y="1783080"/>
+            <a:ext cx="5272887" cy="4572000"/>
           </a:xfrm>
           <a:prstGeom prst="roundRect">
             <a:avLst>
-              <a:gd name="adj" fmla="val 8000"/>
+              <a:gd name="adj" fmla="val 4000"/>
             </a:avLst>
           </a:prstGeom>
           <a:solidFill>
-            <a:srgbClr val="FDF9ED"/>
+            <a:srgbClr val="FBF8EC"/>
           </a:solidFill>
-          <a:ln w="12700">
-            <a:solidFill>
-              <a:srgbClr val="F9EFC8"/>
-            </a:solidFill>
+          <a:ln>
+            <a:noFill/>
           </a:ln>
         </p:spPr>
         <p:txBody>
@@ -3975,14 +4196,43 @@
       </p:sp>
       <p:sp>
         <p:nvSpPr>
-          <p:cNvPr id="5" name="칸 제목 바"/>
+          <p:cNvPr id="7" name="포인트 막대"/>
           <p:cNvSpPr/>
           <p:nvPr/>
         </p:nvSpPr>
         <p:spPr>
           <a:xfrm>
-            <a:off x="731520" y="1600200"/>
-            <a:ext cx="5181447" cy="640080"/>
+            <a:off x="640080" y="1892807"/>
+            <a:ext cx="54864" cy="4352544"/>
+          </a:xfrm>
+          <a:prstGeom prst="rect">
+            <a:avLst/>
+          </a:prstGeom>
+          <a:solidFill>
+            <a:srgbClr val="D8C579"/>
+          </a:solidFill>
+          <a:ln>
+            <a:noFill/>
+          </a:ln>
+        </p:spPr>
+        <p:txBody>
+          <a:bodyPr rtlCol="0" anchor="ctr"/>
+          <a:lstStyle/>
+          <a:p>
+            <a:pPr algn="ctr"/>
+          </a:p>
+        </p:txBody>
+      </p:sp>
+      <p:sp>
+        <p:nvSpPr>
+          <p:cNvPr id="8" name="칸 제목 바"/>
+          <p:cNvSpPr/>
+          <p:nvPr/>
+        </p:nvSpPr>
+        <p:spPr>
+          <a:xfrm>
+            <a:off x="640080" y="1783080"/>
+            <a:ext cx="5272887" cy="640080"/>
           </a:xfrm>
           <a:prstGeom prst="roundRect">
             <a:avLst>
@@ -3990,7 +4240,7 @@
             </a:avLst>
           </a:prstGeom>
           <a:solidFill>
-            <a:srgbClr val="CEAB1C"/>
+            <a:srgbClr val="D8C579"/>
           </a:solidFill>
           <a:ln>
             <a:noFill/>
@@ -4006,14 +4256,14 @@
       </p:sp>
       <p:sp>
         <p:nvSpPr>
-          <p:cNvPr id="6" name="TextBox 5"/>
+          <p:cNvPr id="9" name="TextBox 8"/>
           <p:cNvSpPr txBox="1"/>
           <p:nvPr/>
         </p:nvSpPr>
         <p:spPr>
           <a:xfrm>
-            <a:off x="914400" y="1600200"/>
-            <a:ext cx="4815687" cy="640080"/>
+            <a:off x="822959" y="1783080"/>
+            <a:ext cx="4907127" cy="640080"/>
           </a:xfrm>
           <a:prstGeom prst="rect">
             <a:avLst/>
@@ -4034,7 +4284,7 @@
             <a:r>
               <a:rPr sz="1800" b="1" i="0">
                 <a:solidFill>
-                  <a:srgbClr val="FFFFFF"/>
+                  <a:srgbClr val="26231F"/>
                 </a:solidFill>
               </a:rPr>
               <a:t>닮은 점</a:t>
@@ -4044,14 +4294,14 @@
       </p:sp>
       <p:sp>
         <p:nvSpPr>
-          <p:cNvPr id="7" name="TextBox 6"/>
+          <p:cNvPr id="10" name="TextBox 9"/>
           <p:cNvSpPr txBox="1"/>
           <p:nvPr/>
         </p:nvSpPr>
         <p:spPr>
           <a:xfrm>
-            <a:off x="960120" y="2423160"/>
-            <a:ext cx="4724247" cy="3703320"/>
+            <a:off x="868680" y="2606040"/>
+            <a:ext cx="4815687" cy="3657600"/>
           </a:xfrm>
           <a:prstGeom prst="rect">
             <a:avLst/>
@@ -4077,7 +4327,7 @@
             <a:r>
               <a:rPr sz="1500" b="0" i="0">
                 <a:solidFill>
-                  <a:srgbClr val="2B2B2B"/>
+                  <a:srgbClr val="26231F"/>
                 </a:solidFill>
               </a:rPr>
               <a:t>내용을 입력하세요</a:t>
@@ -4097,7 +4347,7 @@
             <a:r>
               <a:rPr sz="1500" b="0" i="0">
                 <a:solidFill>
-                  <a:srgbClr val="2B2B2B"/>
+                  <a:srgbClr val="26231F"/>
                 </a:solidFill>
               </a:rPr>
               <a:t>내용을 입력하세요</a:t>
@@ -4117,7 +4367,7 @@
             <a:r>
               <a:rPr sz="1500" b="0" i="0">
                 <a:solidFill>
-                  <a:srgbClr val="2B2B2B"/>
+                  <a:srgbClr val="26231F"/>
                 </a:solidFill>
               </a:rPr>
               <a:t>내용을 입력하세요</a:t>
@@ -4127,27 +4377,25 @@
       </p:sp>
       <p:sp>
         <p:nvSpPr>
-          <p:cNvPr id="8" name="오른쪽 칸"/>
+          <p:cNvPr id="11" name="오른쪽 칸"/>
           <p:cNvSpPr/>
           <p:nvPr/>
         </p:nvSpPr>
         <p:spPr>
           <a:xfrm>
-            <a:off x="6278727" y="1600200"/>
-            <a:ext cx="5181447" cy="4617720"/>
+            <a:off x="6278727" y="1783080"/>
+            <a:ext cx="5272887" cy="4572000"/>
           </a:xfrm>
           <a:prstGeom prst="roundRect">
             <a:avLst>
-              <a:gd name="adj" fmla="val 8000"/>
+              <a:gd name="adj" fmla="val 4000"/>
             </a:avLst>
           </a:prstGeom>
           <a:solidFill>
-            <a:srgbClr val="F9EFC8"/>
+            <a:srgbClr val="F6EFD5"/>
           </a:solidFill>
-          <a:ln w="12700">
-            <a:solidFill>
-              <a:srgbClr val="F9EFC8"/>
-            </a:solidFill>
+          <a:ln>
+            <a:noFill/>
           </a:ln>
         </p:spPr>
         <p:txBody>
@@ -4160,14 +4408,43 @@
       </p:sp>
       <p:sp>
         <p:nvSpPr>
-          <p:cNvPr id="9" name="칸 제목 바"/>
+          <p:cNvPr id="12" name="포인트 막대"/>
           <p:cNvSpPr/>
           <p:nvPr/>
         </p:nvSpPr>
         <p:spPr>
           <a:xfrm>
-            <a:off x="6278727" y="1600200"/>
-            <a:ext cx="5181447" cy="640080"/>
+            <a:off x="6278727" y="1892807"/>
+            <a:ext cx="54864" cy="4352544"/>
+          </a:xfrm>
+          <a:prstGeom prst="rect">
+            <a:avLst/>
+          </a:prstGeom>
+          <a:solidFill>
+            <a:srgbClr val="D8C579"/>
+          </a:solidFill>
+          <a:ln>
+            <a:noFill/>
+          </a:ln>
+        </p:spPr>
+        <p:txBody>
+          <a:bodyPr rtlCol="0" anchor="ctr"/>
+          <a:lstStyle/>
+          <a:p>
+            <a:pPr algn="ctr"/>
+          </a:p>
+        </p:txBody>
+      </p:sp>
+      <p:sp>
+        <p:nvSpPr>
+          <p:cNvPr id="13" name="칸 제목 바"/>
+          <p:cNvSpPr/>
+          <p:nvPr/>
+        </p:nvSpPr>
+        <p:spPr>
+          <a:xfrm>
+            <a:off x="6278727" y="1783080"/>
+            <a:ext cx="5272887" cy="640080"/>
           </a:xfrm>
           <a:prstGeom prst="roundRect">
             <a:avLst>
@@ -4175,7 +4452,7 @@
             </a:avLst>
           </a:prstGeom>
           <a:solidFill>
-            <a:srgbClr val="756110"/>
+            <a:srgbClr val="494227"/>
           </a:solidFill>
           <a:ln>
             <a:noFill/>
@@ -4191,14 +4468,14 @@
       </p:sp>
       <p:sp>
         <p:nvSpPr>
-          <p:cNvPr id="10" name="TextBox 9"/>
+          <p:cNvPr id="14" name="TextBox 13"/>
           <p:cNvSpPr txBox="1"/>
           <p:nvPr/>
         </p:nvSpPr>
         <p:spPr>
           <a:xfrm>
-            <a:off x="6461607" y="1600200"/>
-            <a:ext cx="4815687" cy="640080"/>
+            <a:off x="6461607" y="1783080"/>
+            <a:ext cx="4907127" cy="640080"/>
           </a:xfrm>
           <a:prstGeom prst="rect">
             <a:avLst/>
@@ -4229,14 +4506,14 @@
       </p:sp>
       <p:sp>
         <p:nvSpPr>
-          <p:cNvPr id="11" name="TextBox 10"/>
+          <p:cNvPr id="15" name="TextBox 14"/>
           <p:cNvSpPr txBox="1"/>
           <p:nvPr/>
         </p:nvSpPr>
         <p:spPr>
           <a:xfrm>
-            <a:off x="6507327" y="2423160"/>
-            <a:ext cx="4724247" cy="3703320"/>
+            <a:off x="6507327" y="2606040"/>
+            <a:ext cx="4815687" cy="3657600"/>
           </a:xfrm>
           <a:prstGeom prst="rect">
             <a:avLst/>
@@ -4262,7 +4539,7 @@
             <a:r>
               <a:rPr sz="1500" b="0" i="0">
                 <a:solidFill>
-                  <a:srgbClr val="2B2B2B"/>
+                  <a:srgbClr val="26231F"/>
                 </a:solidFill>
               </a:rPr>
               <a:t>내용을 입력하세요</a:t>
@@ -4282,7 +4559,7 @@
             <a:r>
               <a:rPr sz="1500" b="0" i="0">
                 <a:solidFill>
-                  <a:srgbClr val="2B2B2B"/>
+                  <a:srgbClr val="26231F"/>
                 </a:solidFill>
               </a:rPr>
               <a:t>내용을 입력하세요</a:t>
@@ -4302,7 +4579,7 @@
             <a:r>
               <a:rPr sz="1500" b="0" i="0">
                 <a:solidFill>
-                  <a:srgbClr val="2B2B2B"/>
+                  <a:srgbClr val="26231F"/>
                 </a:solidFill>
               </a:rPr>
               <a:t>내용을 입력하세요</a:t>
@@ -4324,7 +4601,7 @@
     <p:bg>
       <p:bgPr>
         <a:solidFill>
-          <a:srgbClr val="CEAB1C"/>
+          <a:srgbClr val="F6EFD5"/>
         </a:solidFill>
         <a:effectLst/>
       </p:bgPr>
@@ -4344,16 +4621,14 @@
         </p:nvSpPr>
         <p:spPr>
           <a:xfrm>
-            <a:off x="274320" y="274320"/>
-            <a:ext cx="11643055" cy="6309360"/>
-          </a:xfrm>
-          <a:prstGeom prst="roundRect">
-            <a:avLst>
-              <a:gd name="adj" fmla="val 3500"/>
-            </a:avLst>
+            <a:off x="640080" y="566928"/>
+            <a:ext cx="10911535" cy="10972"/>
+          </a:xfrm>
+          <a:prstGeom prst="rect">
+            <a:avLst/>
           </a:prstGeom>
           <a:solidFill>
-            <a:srgbClr val="FFFFFF"/>
+            <a:srgbClr val="26231F"/>
           </a:solidFill>
           <a:ln>
             <a:noFill/>
@@ -4369,6 +4644,73 @@
       </p:sp>
       <p:sp>
         <p:nvSpPr>
+          <p:cNvPr id="4" name="상단 라벨"/>
+          <p:cNvSpPr txBox="1"/>
+          <p:nvPr/>
+        </p:nvSpPr>
+        <p:spPr>
+          <a:xfrm>
+            <a:off x="640080" y="237744"/>
+            <a:ext cx="5486400" cy="274320"/>
+          </a:xfrm>
+          <a:prstGeom prst="rect">
+            <a:avLst/>
+          </a:prstGeom>
+          <a:noFill/>
+        </p:spPr>
+        <p:txBody>
+          <a:bodyPr wrap="square" lIns="54864" rIns="54864" tIns="27432" bIns="27432" anchor="ctr">
+            <a:noAutofit/>
+          </a:bodyPr>
+          <a:lstStyle/>
+          <a:p>
+            <a:pPr algn="l">
+              <a:lnSpc>
+                <a:spcPct val="115000"/>
+              </a:lnSpc>
+            </a:pPr>
+            <a:r>
+              <a:rPr sz="900" b="1" i="0" spc="250">
+                <a:solidFill>
+                  <a:srgbClr val="26231F"/>
+                </a:solidFill>
+              </a:rPr>
+              <a:t>WEDDING</a:t>
+            </a:r>
+          </a:p>
+        </p:txBody>
+      </p:sp>
+      <p:sp>
+        <p:nvSpPr>
+          <p:cNvPr id="5" name="포인트"/>
+          <p:cNvSpPr/>
+          <p:nvPr/>
+        </p:nvSpPr>
+        <p:spPr>
+          <a:xfrm rot="18900000">
+            <a:off x="11204143" y="246888"/>
+            <a:ext cx="237744" cy="237744"/>
+          </a:xfrm>
+          <a:prstGeom prst="teardrop">
+            <a:avLst/>
+          </a:prstGeom>
+          <a:solidFill>
+            <a:srgbClr val="D8C579"/>
+          </a:solidFill>
+          <a:ln>
+            <a:noFill/>
+          </a:ln>
+        </p:spPr>
+        <p:txBody>
+          <a:bodyPr rtlCol="0" anchor="ctr"/>
+          <a:lstStyle/>
+          <a:p>
+            <a:pPr algn="ctr"/>
+          </a:p>
+        </p:txBody>
+      </p:sp>
+      <p:sp>
+        <p:nvSpPr>
           <p:cNvPr id="2" name="Title 1"/>
           <p:cNvSpPr>
             <a:spLocks noGrp="1"/>
@@ -4379,8 +4721,8 @@
         </p:nvSpPr>
         <p:spPr>
           <a:xfrm>
-            <a:off x="731520" y="548640"/>
-            <a:ext cx="9448495" cy="868680"/>
+            <a:off x="640080" y="731520"/>
+            <a:ext cx="10911535" cy="822960"/>
           </a:xfrm>
         </p:spPr>
         <p:txBody>
@@ -4397,7 +4739,7 @@
             <a:r>
               <a:rPr sz="3000" b="1" i="0">
                 <a:solidFill>
-                  <a:srgbClr val="756110"/>
+                  <a:srgbClr val="26231F"/>
                 </a:solidFill>
               </a:rPr>
               <a:t>서로에게 하고 싶은 말</a:t>
@@ -4407,27 +4749,25 @@
       </p:sp>
       <p:sp>
         <p:nvSpPr>
-          <p:cNvPr id="4" name="왼쪽 칸"/>
+          <p:cNvPr id="6" name="왼쪽 칸"/>
           <p:cNvSpPr/>
           <p:nvPr/>
         </p:nvSpPr>
         <p:spPr>
           <a:xfrm>
-            <a:off x="731520" y="1600200"/>
-            <a:ext cx="5181447" cy="4617720"/>
+            <a:off x="640080" y="1783080"/>
+            <a:ext cx="5272887" cy="4572000"/>
           </a:xfrm>
           <a:prstGeom prst="roundRect">
             <a:avLst>
-              <a:gd name="adj" fmla="val 8000"/>
+              <a:gd name="adj" fmla="val 4000"/>
             </a:avLst>
           </a:prstGeom>
           <a:solidFill>
-            <a:srgbClr val="FDF9ED"/>
+            <a:srgbClr val="FBF8EC"/>
           </a:solidFill>
-          <a:ln w="12700">
-            <a:solidFill>
-              <a:srgbClr val="F9EFC8"/>
-            </a:solidFill>
+          <a:ln>
+            <a:noFill/>
           </a:ln>
         </p:spPr>
         <p:txBody>
@@ -4440,14 +4780,43 @@
       </p:sp>
       <p:sp>
         <p:nvSpPr>
-          <p:cNvPr id="5" name="칸 제목 바"/>
+          <p:cNvPr id="7" name="포인트 막대"/>
           <p:cNvSpPr/>
           <p:nvPr/>
         </p:nvSpPr>
         <p:spPr>
           <a:xfrm>
-            <a:off x="731520" y="1600200"/>
-            <a:ext cx="5181447" cy="640080"/>
+            <a:off x="640080" y="1892807"/>
+            <a:ext cx="54864" cy="4352544"/>
+          </a:xfrm>
+          <a:prstGeom prst="rect">
+            <a:avLst/>
+          </a:prstGeom>
+          <a:solidFill>
+            <a:srgbClr val="D8C579"/>
+          </a:solidFill>
+          <a:ln>
+            <a:noFill/>
+          </a:ln>
+        </p:spPr>
+        <p:txBody>
+          <a:bodyPr rtlCol="0" anchor="ctr"/>
+          <a:lstStyle/>
+          <a:p>
+            <a:pPr algn="ctr"/>
+          </a:p>
+        </p:txBody>
+      </p:sp>
+      <p:sp>
+        <p:nvSpPr>
+          <p:cNvPr id="8" name="칸 제목 바"/>
+          <p:cNvSpPr/>
+          <p:nvPr/>
+        </p:nvSpPr>
+        <p:spPr>
+          <a:xfrm>
+            <a:off x="640080" y="1783080"/>
+            <a:ext cx="5272887" cy="640080"/>
           </a:xfrm>
           <a:prstGeom prst="roundRect">
             <a:avLst>
@@ -4455,7 +4824,7 @@
             </a:avLst>
           </a:prstGeom>
           <a:solidFill>
-            <a:srgbClr val="CEAB1C"/>
+            <a:srgbClr val="D8C579"/>
           </a:solidFill>
           <a:ln>
             <a:noFill/>
@@ -4471,14 +4840,14 @@
       </p:sp>
       <p:sp>
         <p:nvSpPr>
-          <p:cNvPr id="6" name="TextBox 5"/>
+          <p:cNvPr id="9" name="TextBox 8"/>
           <p:cNvSpPr txBox="1"/>
           <p:nvPr/>
         </p:nvSpPr>
         <p:spPr>
           <a:xfrm>
-            <a:off x="914400" y="1600200"/>
-            <a:ext cx="4815687" cy="640080"/>
+            <a:off x="822959" y="1783080"/>
+            <a:ext cx="4907127" cy="640080"/>
           </a:xfrm>
           <a:prstGeom prst="rect">
             <a:avLst/>
@@ -4499,7 +4868,7 @@
             <a:r>
               <a:rPr sz="1800" b="1" i="0">
                 <a:solidFill>
-                  <a:srgbClr val="FFFFFF"/>
+                  <a:srgbClr val="26231F"/>
                 </a:solidFill>
               </a:rPr>
               <a:t>신랑이 신부에게</a:t>
@@ -4509,14 +4878,14 @@
       </p:sp>
       <p:sp>
         <p:nvSpPr>
-          <p:cNvPr id="7" name="TextBox 6"/>
+          <p:cNvPr id="10" name="TextBox 9"/>
           <p:cNvSpPr txBox="1"/>
           <p:nvPr/>
         </p:nvSpPr>
         <p:spPr>
           <a:xfrm>
-            <a:off x="960120" y="2423160"/>
-            <a:ext cx="4724247" cy="3703320"/>
+            <a:off x="868680" y="2606040"/>
+            <a:ext cx="4815687" cy="3657600"/>
           </a:xfrm>
           <a:prstGeom prst="rect">
             <a:avLst/>
@@ -4542,7 +4911,7 @@
             <a:r>
               <a:rPr sz="1500" b="0" i="0">
                 <a:solidFill>
-                  <a:srgbClr val="2B2B2B"/>
+                  <a:srgbClr val="26231F"/>
                 </a:solidFill>
               </a:rPr>
               <a:t>하고 싶은 말을 적어 주세요</a:t>
@@ -4552,27 +4921,25 @@
       </p:sp>
       <p:sp>
         <p:nvSpPr>
-          <p:cNvPr id="8" name="오른쪽 칸"/>
+          <p:cNvPr id="11" name="오른쪽 칸"/>
           <p:cNvSpPr/>
           <p:nvPr/>
         </p:nvSpPr>
         <p:spPr>
           <a:xfrm>
-            <a:off x="6278727" y="1600200"/>
-            <a:ext cx="5181447" cy="4617720"/>
+            <a:off x="6278727" y="1783080"/>
+            <a:ext cx="5272887" cy="4572000"/>
           </a:xfrm>
           <a:prstGeom prst="roundRect">
             <a:avLst>
-              <a:gd name="adj" fmla="val 8000"/>
+              <a:gd name="adj" fmla="val 4000"/>
             </a:avLst>
           </a:prstGeom>
           <a:solidFill>
-            <a:srgbClr val="F9EFC8"/>
+            <a:srgbClr val="F6EFD5"/>
           </a:solidFill>
-          <a:ln w="12700">
-            <a:solidFill>
-              <a:srgbClr val="F9EFC8"/>
-            </a:solidFill>
+          <a:ln>
+            <a:noFill/>
           </a:ln>
         </p:spPr>
         <p:txBody>
@@ -4585,14 +4952,43 @@
       </p:sp>
       <p:sp>
         <p:nvSpPr>
-          <p:cNvPr id="9" name="칸 제목 바"/>
+          <p:cNvPr id="12" name="포인트 막대"/>
           <p:cNvSpPr/>
           <p:nvPr/>
         </p:nvSpPr>
         <p:spPr>
           <a:xfrm>
-            <a:off x="6278727" y="1600200"/>
-            <a:ext cx="5181447" cy="640080"/>
+            <a:off x="6278727" y="1892807"/>
+            <a:ext cx="54864" cy="4352544"/>
+          </a:xfrm>
+          <a:prstGeom prst="rect">
+            <a:avLst/>
+          </a:prstGeom>
+          <a:solidFill>
+            <a:srgbClr val="D8C579"/>
+          </a:solidFill>
+          <a:ln>
+            <a:noFill/>
+          </a:ln>
+        </p:spPr>
+        <p:txBody>
+          <a:bodyPr rtlCol="0" anchor="ctr"/>
+          <a:lstStyle/>
+          <a:p>
+            <a:pPr algn="ctr"/>
+          </a:p>
+        </p:txBody>
+      </p:sp>
+      <p:sp>
+        <p:nvSpPr>
+          <p:cNvPr id="13" name="칸 제목 바"/>
+          <p:cNvSpPr/>
+          <p:nvPr/>
+        </p:nvSpPr>
+        <p:spPr>
+          <a:xfrm>
+            <a:off x="6278727" y="1783080"/>
+            <a:ext cx="5272887" cy="640080"/>
           </a:xfrm>
           <a:prstGeom prst="roundRect">
             <a:avLst>
@@ -4600,7 +4996,7 @@
             </a:avLst>
           </a:prstGeom>
           <a:solidFill>
-            <a:srgbClr val="756110"/>
+            <a:srgbClr val="494227"/>
           </a:solidFill>
           <a:ln>
             <a:noFill/>
@@ -4616,14 +5012,14 @@
       </p:sp>
       <p:sp>
         <p:nvSpPr>
-          <p:cNvPr id="10" name="TextBox 9"/>
+          <p:cNvPr id="14" name="TextBox 13"/>
           <p:cNvSpPr txBox="1"/>
           <p:nvPr/>
         </p:nvSpPr>
         <p:spPr>
           <a:xfrm>
-            <a:off x="6461607" y="1600200"/>
-            <a:ext cx="4815687" cy="640080"/>
+            <a:off x="6461607" y="1783080"/>
+            <a:ext cx="4907127" cy="640080"/>
           </a:xfrm>
           <a:prstGeom prst="rect">
             <a:avLst/>
@@ -4654,14 +5050,14 @@
       </p:sp>
       <p:sp>
         <p:nvSpPr>
-          <p:cNvPr id="11" name="TextBox 10"/>
+          <p:cNvPr id="15" name="TextBox 14"/>
           <p:cNvSpPr txBox="1"/>
           <p:nvPr/>
         </p:nvSpPr>
         <p:spPr>
           <a:xfrm>
-            <a:off x="6507327" y="2423160"/>
-            <a:ext cx="4724247" cy="3703320"/>
+            <a:off x="6507327" y="2606040"/>
+            <a:ext cx="4815687" cy="3657600"/>
           </a:xfrm>
           <a:prstGeom prst="rect">
             <a:avLst/>
@@ -4687,7 +5083,7 @@
             <a:r>
               <a:rPr sz="1500" b="0" i="0">
                 <a:solidFill>
-                  <a:srgbClr val="2B2B2B"/>
+                  <a:srgbClr val="26231F"/>
                 </a:solidFill>
               </a:rPr>
               <a:t>하고 싶은 말을 적어 주세요</a:t>
@@ -4709,7 +5105,7 @@
     <p:bg>
       <p:bgPr>
         <a:solidFill>
-          <a:srgbClr val="CEAB1C"/>
+          <a:srgbClr val="F6EFD5"/>
         </a:solidFill>
         <a:effectLst/>
       </p:bgPr>
@@ -4729,16 +5125,14 @@
         </p:nvSpPr>
         <p:spPr>
           <a:xfrm>
-            <a:off x="274320" y="274320"/>
-            <a:ext cx="11643055" cy="6309360"/>
-          </a:xfrm>
-          <a:prstGeom prst="roundRect">
-            <a:avLst>
-              <a:gd name="adj" fmla="val 3500"/>
-            </a:avLst>
+            <a:off x="640080" y="566928"/>
+            <a:ext cx="10911535" cy="10972"/>
+          </a:xfrm>
+          <a:prstGeom prst="rect">
+            <a:avLst/>
           </a:prstGeom>
           <a:solidFill>
-            <a:srgbClr val="FFFFFF"/>
+            <a:srgbClr val="26231F"/>
           </a:solidFill>
           <a:ln>
             <a:noFill/>
@@ -4754,6 +5148,73 @@
       </p:sp>
       <p:sp>
         <p:nvSpPr>
+          <p:cNvPr id="4" name="상단 라벨"/>
+          <p:cNvSpPr txBox="1"/>
+          <p:nvPr/>
+        </p:nvSpPr>
+        <p:spPr>
+          <a:xfrm>
+            <a:off x="640080" y="237744"/>
+            <a:ext cx="5486400" cy="274320"/>
+          </a:xfrm>
+          <a:prstGeom prst="rect">
+            <a:avLst/>
+          </a:prstGeom>
+          <a:noFill/>
+        </p:spPr>
+        <p:txBody>
+          <a:bodyPr wrap="square" lIns="54864" rIns="54864" tIns="27432" bIns="27432" anchor="ctr">
+            <a:noAutofit/>
+          </a:bodyPr>
+          <a:lstStyle/>
+          <a:p>
+            <a:pPr algn="l">
+              <a:lnSpc>
+                <a:spcPct val="115000"/>
+              </a:lnSpc>
+            </a:pPr>
+            <a:r>
+              <a:rPr sz="900" b="1" i="0" spc="250">
+                <a:solidFill>
+                  <a:srgbClr val="26231F"/>
+                </a:solidFill>
+              </a:rPr>
+              <a:t>WEDDING</a:t>
+            </a:r>
+          </a:p>
+        </p:txBody>
+      </p:sp>
+      <p:sp>
+        <p:nvSpPr>
+          <p:cNvPr id="5" name="포인트"/>
+          <p:cNvSpPr/>
+          <p:nvPr/>
+        </p:nvSpPr>
+        <p:spPr>
+          <a:xfrm rot="18900000">
+            <a:off x="11204143" y="246888"/>
+            <a:ext cx="237744" cy="237744"/>
+          </a:xfrm>
+          <a:prstGeom prst="teardrop">
+            <a:avLst/>
+          </a:prstGeom>
+          <a:solidFill>
+            <a:srgbClr val="D8C579"/>
+          </a:solidFill>
+          <a:ln>
+            <a:noFill/>
+          </a:ln>
+        </p:spPr>
+        <p:txBody>
+          <a:bodyPr rtlCol="0" anchor="ctr"/>
+          <a:lstStyle/>
+          <a:p>
+            <a:pPr algn="ctr"/>
+          </a:p>
+        </p:txBody>
+      </p:sp>
+      <p:sp>
+        <p:nvSpPr>
           <p:cNvPr id="2" name="Title 1"/>
           <p:cNvSpPr>
             <a:spLocks noGrp="1"/>
@@ -4764,8 +5225,8 @@
         </p:nvSpPr>
         <p:spPr>
           <a:xfrm>
-            <a:off x="731520" y="548640"/>
-            <a:ext cx="9448495" cy="868680"/>
+            <a:off x="640080" y="731520"/>
+            <a:ext cx="10911535" cy="822960"/>
           </a:xfrm>
         </p:spPr>
         <p:txBody>
@@ -4782,7 +5243,7 @@
             <a:r>
               <a:rPr sz="3000" b="1" i="0">
                 <a:solidFill>
-                  <a:srgbClr val="756110"/>
+                  <a:srgbClr val="26231F"/>
                 </a:solidFill>
               </a:rPr>
               <a:t>웨딩 사진</a:t>
@@ -4792,14 +5253,14 @@
       </p:sp>
       <p:sp>
         <p:nvSpPr>
-          <p:cNvPr id="4" name="사진 자리"/>
+          <p:cNvPr id="6" name="사진 자리"/>
           <p:cNvSpPr/>
           <p:nvPr/>
         </p:nvSpPr>
         <p:spPr>
           <a:xfrm>
-            <a:off x="731520" y="1600200"/>
-            <a:ext cx="3454298" cy="2217420"/>
+            <a:off x="640080" y="1783080"/>
+            <a:ext cx="3515258" cy="2194560"/>
           </a:xfrm>
           <a:prstGeom prst="roundRect">
             <a:avLst>
@@ -4807,12 +5268,10 @@
             </a:avLst>
           </a:prstGeom>
           <a:solidFill>
-            <a:srgbClr val="F9EFC8"/>
+            <a:srgbClr val="F6EFD5"/>
           </a:solidFill>
           <a:ln w="19050">
-            <a:solidFill>
-              <a:srgbClr val="CEAB1C"/>
-            </a:solidFill>
+            <a:noFill/>
             <a:prstDash val="dash"/>
           </a:ln>
         </p:spPr>
@@ -4830,7 +5289,7 @@
             <a:r>
               <a:rPr sz="1200" b="0" i="0">
                 <a:solidFill>
-                  <a:srgbClr val="756110"/>
+                  <a:srgbClr val="8E8780"/>
                 </a:solidFill>
               </a:rPr>
               <a:t>사진 1</a:t>
@@ -4840,14 +5299,14 @@
       </p:sp>
       <p:sp>
         <p:nvSpPr>
-          <p:cNvPr id="5" name="사진 자리"/>
+          <p:cNvPr id="7" name="사진 자리"/>
           <p:cNvSpPr/>
           <p:nvPr/>
         </p:nvSpPr>
         <p:spPr>
           <a:xfrm>
-            <a:off x="4368698" y="1600200"/>
-            <a:ext cx="3454298" cy="2217420"/>
+            <a:off x="4338218" y="1783080"/>
+            <a:ext cx="3515258" cy="2194560"/>
           </a:xfrm>
           <a:prstGeom prst="roundRect">
             <a:avLst>
@@ -4855,12 +5314,10 @@
             </a:avLst>
           </a:prstGeom>
           <a:solidFill>
-            <a:srgbClr val="F9EFC8"/>
+            <a:srgbClr val="F6EFD5"/>
           </a:solidFill>
           <a:ln w="19050">
-            <a:solidFill>
-              <a:srgbClr val="CEAB1C"/>
-            </a:solidFill>
+            <a:noFill/>
             <a:prstDash val="dash"/>
           </a:ln>
         </p:spPr>
@@ -4878,7 +5335,7 @@
             <a:r>
               <a:rPr sz="1200" b="0" i="0">
                 <a:solidFill>
-                  <a:srgbClr val="756110"/>
+                  <a:srgbClr val="8E8780"/>
                 </a:solidFill>
               </a:rPr>
               <a:t>사진 2</a:t>
@@ -4888,14 +5345,14 @@
       </p:sp>
       <p:sp>
         <p:nvSpPr>
-          <p:cNvPr id="6" name="사진 자리"/>
+          <p:cNvPr id="8" name="사진 자리"/>
           <p:cNvSpPr/>
           <p:nvPr/>
         </p:nvSpPr>
         <p:spPr>
           <a:xfrm>
-            <a:off x="8005876" y="1600200"/>
-            <a:ext cx="3454298" cy="2217420"/>
+            <a:off x="8036356" y="1783080"/>
+            <a:ext cx="3515258" cy="2194560"/>
           </a:xfrm>
           <a:prstGeom prst="roundRect">
             <a:avLst>
@@ -4903,12 +5360,10 @@
             </a:avLst>
           </a:prstGeom>
           <a:solidFill>
-            <a:srgbClr val="F9EFC8"/>
+            <a:srgbClr val="F6EFD5"/>
           </a:solidFill>
           <a:ln w="19050">
-            <a:solidFill>
-              <a:srgbClr val="CEAB1C"/>
-            </a:solidFill>
+            <a:noFill/>
             <a:prstDash val="dash"/>
           </a:ln>
         </p:spPr>
@@ -4926,7 +5381,7 @@
             <a:r>
               <a:rPr sz="1200" b="0" i="0">
                 <a:solidFill>
-                  <a:srgbClr val="756110"/>
+                  <a:srgbClr val="8E8780"/>
                 </a:solidFill>
               </a:rPr>
               <a:t>사진 3</a:t>
@@ -4936,14 +5391,14 @@
       </p:sp>
       <p:sp>
         <p:nvSpPr>
-          <p:cNvPr id="7" name="사진 자리"/>
+          <p:cNvPr id="9" name="사진 자리"/>
           <p:cNvSpPr/>
           <p:nvPr/>
         </p:nvSpPr>
         <p:spPr>
           <a:xfrm>
-            <a:off x="731520" y="4000500"/>
-            <a:ext cx="3454298" cy="2217420"/>
+            <a:off x="640080" y="4160520"/>
+            <a:ext cx="3515258" cy="2194560"/>
           </a:xfrm>
           <a:prstGeom prst="roundRect">
             <a:avLst>
@@ -4951,12 +5406,10 @@
             </a:avLst>
           </a:prstGeom>
           <a:solidFill>
-            <a:srgbClr val="F9EFC8"/>
+            <a:srgbClr val="F6EFD5"/>
           </a:solidFill>
           <a:ln w="19050">
-            <a:solidFill>
-              <a:srgbClr val="CEAB1C"/>
-            </a:solidFill>
+            <a:noFill/>
             <a:prstDash val="dash"/>
           </a:ln>
         </p:spPr>
@@ -4974,7 +5427,7 @@
             <a:r>
               <a:rPr sz="1200" b="0" i="0">
                 <a:solidFill>
-                  <a:srgbClr val="756110"/>
+                  <a:srgbClr val="8E8780"/>
                 </a:solidFill>
               </a:rPr>
               <a:t>사진 4</a:t>
@@ -4984,14 +5437,14 @@
       </p:sp>
       <p:sp>
         <p:nvSpPr>
-          <p:cNvPr id="8" name="사진 자리"/>
+          <p:cNvPr id="10" name="사진 자리"/>
           <p:cNvSpPr/>
           <p:nvPr/>
         </p:nvSpPr>
         <p:spPr>
           <a:xfrm>
-            <a:off x="4368698" y="4000500"/>
-            <a:ext cx="3454298" cy="2217420"/>
+            <a:off x="4338218" y="4160520"/>
+            <a:ext cx="3515258" cy="2194560"/>
           </a:xfrm>
           <a:prstGeom prst="roundRect">
             <a:avLst>
@@ -4999,12 +5452,10 @@
             </a:avLst>
           </a:prstGeom>
           <a:solidFill>
-            <a:srgbClr val="F9EFC8"/>
+            <a:srgbClr val="F6EFD5"/>
           </a:solidFill>
           <a:ln w="19050">
-            <a:solidFill>
-              <a:srgbClr val="CEAB1C"/>
-            </a:solidFill>
+            <a:noFill/>
             <a:prstDash val="dash"/>
           </a:ln>
         </p:spPr>
@@ -5022,7 +5473,7 @@
             <a:r>
               <a:rPr sz="1200" b="0" i="0">
                 <a:solidFill>
-                  <a:srgbClr val="756110"/>
+                  <a:srgbClr val="8E8780"/>
                 </a:solidFill>
               </a:rPr>
               <a:t>사진 5</a:t>
@@ -5032,14 +5483,14 @@
       </p:sp>
       <p:sp>
         <p:nvSpPr>
-          <p:cNvPr id="9" name="사진 자리"/>
+          <p:cNvPr id="11" name="사진 자리"/>
           <p:cNvSpPr/>
           <p:nvPr/>
         </p:nvSpPr>
         <p:spPr>
           <a:xfrm>
-            <a:off x="8005876" y="4000500"/>
-            <a:ext cx="3454298" cy="2217420"/>
+            <a:off x="8036356" y="4160520"/>
+            <a:ext cx="3515258" cy="2194560"/>
           </a:xfrm>
           <a:prstGeom prst="roundRect">
             <a:avLst>
@@ -5047,12 +5498,10 @@
             </a:avLst>
           </a:prstGeom>
           <a:solidFill>
-            <a:srgbClr val="F9EFC8"/>
+            <a:srgbClr val="F6EFD5"/>
           </a:solidFill>
           <a:ln w="19050">
-            <a:solidFill>
-              <a:srgbClr val="CEAB1C"/>
-            </a:solidFill>
+            <a:noFill/>
             <a:prstDash val="dash"/>
           </a:ln>
         </p:spPr>
@@ -5070,7 +5519,7 @@
             <a:r>
               <a:rPr sz="1200" b="0" i="0">
                 <a:solidFill>
-                  <a:srgbClr val="756110"/>
+                  <a:srgbClr val="8E8780"/>
                 </a:solidFill>
               </a:rPr>
               <a:t>사진 6</a:t>
@@ -5089,6 +5538,14 @@
 <file path=ppt/slides/slide6.xml><?xml version="1.0" encoding="utf-8"?>
 <p:sld xmlns:a="http://schemas.openxmlformats.org/drawingml/2006/main" xmlns:p="http://schemas.openxmlformats.org/presentationml/2006/main" xmlns:r="http://schemas.openxmlformats.org/officeDocument/2006/relationships">
   <p:cSld>
+    <p:bg>
+      <p:bgPr>
+        <a:solidFill>
+          <a:srgbClr val="FBF8EC"/>
+        </a:solidFill>
+        <a:effectLst/>
+      </p:bgPr>
+    </p:bg>
     <p:spTree>
       <p:nvGrpSpPr>
         <p:cNvPr id="1" name=""/>
@@ -5096,30 +5553,119 @@
         <p:nvPr/>
       </p:nvGrpSpPr>
       <p:grpSpPr/>
-      <p:pic>
-        <p:nvPicPr>
-          <p:cNvPr id="3" name="표지 그림" descr="wedding-31.jpg"/>
-          <p:cNvPicPr>
-            <a:picLocks noChangeAspect="1"/>
-          </p:cNvPicPr>
+      <p:sp>
+        <p:nvSpPr>
+          <p:cNvPr id="3" name="사진 자리"/>
+          <p:cNvSpPr/>
           <p:nvPr/>
-        </p:nvPicPr>
-        <p:blipFill>
-          <a:blip r:embed="rId2"/>
-          <a:stretch>
-            <a:fillRect/>
-          </a:stretch>
-        </p:blipFill>
-        <p:spPr>
-          <a:xfrm>
-            <a:off x="0" y="0"/>
-            <a:ext cx="12191695" cy="6858000"/>
+        </p:nvSpPr>
+        <p:spPr>
+          <a:xfrm>
+            <a:off x="1463003" y="685800"/>
+            <a:ext cx="3169840" cy="5486400"/>
+          </a:xfrm>
+          <a:prstGeom prst="round2SameRect">
+            <a:avLst>
+              <a:gd name="adj1" fmla="val 50000"/>
+              <a:gd name="adj2" fmla="val 0"/>
+            </a:avLst>
+          </a:prstGeom>
+          <a:solidFill>
+            <a:srgbClr val="EBDEAD"/>
+          </a:solidFill>
+          <a:ln>
+            <a:noFill/>
+          </a:ln>
+        </p:spPr>
+        <p:txBody>
+          <a:bodyPr rtlCol="0" anchor="ctr" wrap="square" lIns="54864" rIns="54864" tIns="27432" bIns="27432">
+            <a:noAutofit/>
+          </a:bodyPr>
+          <a:lstStyle/>
+          <a:p>
+            <a:pPr algn="ctr">
+              <a:lnSpc>
+                <a:spcPct val="100000"/>
+              </a:lnSpc>
+            </a:pPr>
+            <a:r>
+              <a:rPr sz="1400" b="0" i="0">
+                <a:solidFill>
+                  <a:srgbClr val="494227"/>
+                </a:solidFill>
+              </a:rPr>
+              <a:t>사진을 넣어 주세요</a:t>
+            </a:r>
+          </a:p>
+        </p:txBody>
+      </p:sp>
+      <p:sp>
+        <p:nvSpPr>
+          <p:cNvPr id="4" name="장식"/>
+          <p:cNvSpPr/>
+          <p:nvPr/>
+        </p:nvSpPr>
+        <p:spPr>
+          <a:xfrm>
+            <a:off x="4358505" y="4251960"/>
+            <a:ext cx="1005840" cy="1005840"/>
+          </a:xfrm>
+          <a:prstGeom prst="ellipse">
+            <a:avLst/>
+          </a:prstGeom>
+          <a:solidFill>
+            <a:srgbClr val="EBDEAD"/>
+          </a:solidFill>
+          <a:ln>
+            <a:noFill/>
+          </a:ln>
+        </p:spPr>
+        <p:txBody>
+          <a:bodyPr rtlCol="0" anchor="ctr"/>
+          <a:lstStyle/>
+          <a:p>
+            <a:pPr algn="ctr"/>
+          </a:p>
+        </p:txBody>
+      </p:sp>
+      <p:sp>
+        <p:nvSpPr>
+          <p:cNvPr id="5" name="라벨"/>
+          <p:cNvSpPr txBox="1"/>
+          <p:nvPr/>
+        </p:nvSpPr>
+        <p:spPr>
+          <a:xfrm>
+            <a:off x="6827349" y="2148840"/>
+            <a:ext cx="4632844" cy="274320"/>
           </a:xfrm>
           <a:prstGeom prst="rect">
             <a:avLst/>
           </a:prstGeom>
-        </p:spPr>
-      </p:pic>
+          <a:noFill/>
+        </p:spPr>
+        <p:txBody>
+          <a:bodyPr wrap="square" lIns="54864" rIns="54864" tIns="27432" bIns="27432" anchor="t">
+            <a:noAutofit/>
+          </a:bodyPr>
+          <a:lstStyle/>
+          <a:p>
+            <a:pPr algn="l">
+              <a:lnSpc>
+                <a:spcPct val="115000"/>
+              </a:lnSpc>
+            </a:pPr>
+            <a:r>
+              <a:rPr sz="1000" b="1" i="0" spc="250">
+                <a:solidFill>
+                  <a:srgbClr val="26231F"/>
+                </a:solidFill>
+              </a:rPr>
+              <a:t>WEDDING</a:t>
+            </a:r>
+          </a:p>
+        </p:txBody>
+      </p:sp>
       <p:sp>
         <p:nvSpPr>
           <p:cNvPr id="2" name="Title 1"/>
@@ -5132,8 +5678,8 @@
         </p:nvSpPr>
         <p:spPr>
           <a:xfrm>
-            <a:off x="853418" y="2057400"/>
-            <a:ext cx="6095847" cy="1554480"/>
+            <a:off x="6827349" y="2606040"/>
+            <a:ext cx="4632844" cy="1188720"/>
           </a:xfrm>
         </p:spPr>
         <p:txBody>
@@ -5150,7 +5696,7 @@
             <a:r>
               <a:rPr sz="3400" b="1" i="0">
                 <a:solidFill>
-                  <a:srgbClr val="756110"/>
+                  <a:srgbClr val="26231F"/>
                 </a:solidFill>
               </a:rPr>
               <a:t>와 주셔서 고맙습니다</a:t>
@@ -5160,14 +5706,14 @@
       </p:sp>
       <p:sp>
         <p:nvSpPr>
-          <p:cNvPr id="4" name="한 줄 문구"/>
+          <p:cNvPr id="6" name="한 줄 문구"/>
           <p:cNvSpPr txBox="1"/>
           <p:nvPr/>
         </p:nvSpPr>
         <p:spPr>
           <a:xfrm>
-            <a:off x="853418" y="3749039"/>
-            <a:ext cx="6095847" cy="822960"/>
+            <a:off x="6827349" y="3886200"/>
+            <a:ext cx="4632844" cy="822960"/>
           </a:xfrm>
           <a:prstGeom prst="rect">
             <a:avLst/>
@@ -5186,9 +5732,9 @@
               </a:lnSpc>
             </a:pPr>
             <a:r>
-              <a:rPr sz="1700" b="0" i="1">
-                <a:solidFill>
-                  <a:srgbClr val="756110"/>
+              <a:rPr sz="1700" b="0" i="0">
+                <a:solidFill>
+                  <a:srgbClr val="26231F"/>
                 </a:solidFill>
               </a:rPr>
               <a:t>잘 살겠습니다</a:t>
@@ -5198,14 +5744,14 @@
       </p:sp>
       <p:sp>
         <p:nvSpPr>
-          <p:cNvPr id="5" name="안내 문구"/>
+          <p:cNvPr id="7" name="안내 문구"/>
           <p:cNvSpPr txBox="1"/>
           <p:nvPr/>
         </p:nvSpPr>
         <p:spPr>
           <a:xfrm>
-            <a:off x="853418" y="4617720"/>
-            <a:ext cx="6095847" cy="914400"/>
+            <a:off x="6827349" y="4754880"/>
+            <a:ext cx="4632844" cy="914400"/>
           </a:xfrm>
           <a:prstGeom prst="rect">
             <a:avLst/>
@@ -5226,7 +5772,7 @@
             <a:r>
               <a:rPr sz="1400" b="0" i="0">
                 <a:solidFill>
-                  <a:srgbClr val="666666"/>
+                  <a:srgbClr val="26231F"/>
                 </a:solidFill>
               </a:rPr>
               <a:t>신랑 이름 ♥ 신부 이름</a:t>
@@ -5253,34 +5799,34 @@
         <a:sysClr val="window" lastClr="FFFFFF"/>
       </a:lt1>
       <a:dk2>
-        <a:srgbClr val="756110"/>
+        <a:srgbClr val="494227"/>
       </a:dk2>
       <a:lt2>
-        <a:srgbClr val="FDF9ED"/>
+        <a:srgbClr val="FBF8EC"/>
       </a:lt2>
       <a:accent1>
-        <a:srgbClr val="CEAB1C"/>
+        <a:srgbClr val="D8C579"/>
       </a:accent1>
       <a:accent2>
-        <a:srgbClr val="3B7791"/>
+        <a:srgbClr val="CEE198"/>
       </a:accent2>
       <a:accent3>
-        <a:srgbClr val="756110"/>
+        <a:srgbClr val="494227"/>
       </a:accent3>
       <a:accent4>
-        <a:srgbClr val="F9EFC8"/>
+        <a:srgbClr val="F6EFD5"/>
       </a:accent4>
       <a:accent5>
-        <a:srgbClr val="849156"/>
+        <a:srgbClr val="D3D388"/>
       </a:accent5>
       <a:accent6>
-        <a:srgbClr val="ACA070"/>
+        <a:srgbClr val="928E7D"/>
       </a:accent6>
       <a:hlink>
-        <a:srgbClr val="CEAB1C"/>
+        <a:srgbClr val="D8C579"/>
       </a:hlink>
       <a:folHlink>
-        <a:srgbClr val="756110"/>
+        <a:srgbClr val="494227"/>
       </a:folHlink>
     </a:clrScheme>
     <a:fontScheme name="Office">
